--- a/自动化模板.pptx
+++ b/自动化模板.pptx
@@ -3248,7 +3248,11 @@
             </a:r>
             <a:r>
               <a:rPr lang="zh-CN" altLang="en-US" sz="2400" dirty="0"/>
-              <a:t>主要集中在卷气严重区</a:t>
+              <a:t>主要集中在卷气</a:t>
+            </a:r>
+            <a:r>
+              <a:rPr lang="zh-CN" altLang="en-US" sz="2400" dirty="0"/>
+              <a:t>较多区</a:t>
             </a:r>
             <a:r>
               <a:rPr lang="en-US" altLang="zh-CN" sz="2400" dirty="0">
@@ -3693,13 +3697,17 @@
           <a:p>
             <a:r>
               <a:rPr lang="zh-CN" altLang="en-US" sz="2400" dirty="0"/>
-              <a:t>铸件内氧化物含量较高</a:t>
+              <a:t>铸件内氧化物含量较高，约为</a:t>
             </a:r>
             <a:r>
               <a:rPr lang="en-US" altLang="zh-CN" sz="2400" dirty="0"/>
-              <a:t>1111G</a:t>
-            </a:r>
-            <a:endParaRPr lang="en-US" altLang="zh-CN" sz="2400" dirty="0"/>
+              <a:t>500g</a:t>
+            </a:r>
+            <a:r>
+              <a:rPr lang="zh-CN" altLang="en-US" sz="2400" dirty="0"/>
+              <a:t>。</a:t>
+            </a:r>
+            <a:endParaRPr lang="zh-CN" altLang="en-US" sz="2400" dirty="0"/>
           </a:p>
         </p:txBody>
       </p:sp>
@@ -4112,7 +4120,11 @@
           <a:p>
             <a:r>
               <a:rPr lang="zh-CN" altLang="en-US" sz="2000" b="1" dirty="0"/>
-              <a:t>凝固与缩孔</a:t>
+              <a:t>凝固与缩孔（缩孔</a:t>
+            </a:r>
+            <a:r>
+              <a:rPr lang="zh-CN" altLang="en-US" sz="2000" b="1" dirty="0"/>
+              <a:t>率）</a:t>
             </a:r>
             <a:endParaRPr lang="zh-CN" altLang="en-US" sz="2000" b="1" dirty="0"/>
           </a:p>
@@ -4298,7 +4310,11 @@
           <a:p>
             <a:r>
               <a:rPr lang="zh-CN" altLang="en-US" sz="2000" b="1" dirty="0"/>
-              <a:t>凝固与缩孔</a:t>
+              <a:t>凝固与缩孔（缩孔</a:t>
+            </a:r>
+            <a:r>
+              <a:rPr lang="zh-CN" altLang="en-US" sz="2000" b="1" dirty="0"/>
+              <a:t>体积）</a:t>
             </a:r>
             <a:endParaRPr lang="zh-CN" altLang="en-US" sz="2000" b="1" dirty="0"/>
           </a:p>
@@ -4379,8 +4395,8 @@
         </p:nvSpPr>
         <p:spPr>
           <a:xfrm>
-            <a:off x="895350" y="6028055"/>
-            <a:ext cx="10548620" cy="829945"/>
+            <a:off x="107950" y="6028055"/>
+            <a:ext cx="11981815" cy="829945"/>
           </a:xfrm>
           <a:prstGeom prst="rect">
             <a:avLst/>
@@ -4395,11 +4411,7 @@
           <a:p>
             <a:r>
               <a:rPr lang="zh-CN" altLang="en-US" sz="2400" dirty="0"/>
-              <a:t>图示部位壁厚较厚，特征为两槽位之间与</a:t>
-            </a:r>
-            <a:r>
-              <a:rPr lang="zh-CN" altLang="en-US" sz="2400" dirty="0"/>
-              <a:t>凸台，凝固较慢，</a:t>
+              <a:t>图示部位壁厚较厚，特征为两槽位之间与凸台，凝固较慢，</a:t>
             </a:r>
             <a:r>
               <a:rPr lang="en-US" altLang="zh-CN" sz="2400" dirty="0">
@@ -4415,7 +4427,7 @@
                   <a:srgbClr val="FF0000"/>
                 </a:solidFill>
               </a:rPr>
-              <a:t>缩孔形成时间</a:t>
+              <a:t>缩孔开始形成时间</a:t>
             </a:r>
             <a:r>
               <a:rPr lang="en-US" altLang="zh-CN" sz="2400" dirty="0">
@@ -4431,7 +4443,31 @@
                   <a:srgbClr val="FF0000"/>
                 </a:solidFill>
               </a:rPr>
-              <a:t>，浇口冷却时间为</a:t>
+              <a:t>到</a:t>
+            </a:r>
+            <a:r>
+              <a:rPr lang="en-US" altLang="zh-CN" sz="2400" dirty="0">
+                <a:solidFill>
+                  <a:srgbClr val="FF0000"/>
+                </a:solidFill>
+              </a:rPr>
+              <a:t>2s</a:t>
+            </a:r>
+            <a:r>
+              <a:rPr lang="zh-CN" altLang="en-US" sz="2400" dirty="0">
+                <a:solidFill>
+                  <a:srgbClr val="FF0000"/>
+                </a:solidFill>
+              </a:rPr>
+              <a:t>之间，浇口开始冷却时间</a:t>
+            </a:r>
+            <a:r>
+              <a:rPr lang="zh-CN" altLang="en-US" sz="2400" dirty="0">
+                <a:solidFill>
+                  <a:srgbClr val="FF0000"/>
+                </a:solidFill>
+              </a:rPr>
+              <a:t>约为</a:t>
             </a:r>
             <a:r>
               <a:rPr lang="en-US" altLang="zh-CN" sz="2400" dirty="0">
@@ -4802,7 +4838,15 @@
           <a:p>
             <a:r>
               <a:rPr lang="zh-CN" altLang="en-US" sz="2400" dirty="0"/>
-              <a:t>热结代表的是铸件该位置的凝固时间长短，越慢凝固的区域在后续形成缩孔的可能性越大。</a:t>
+              <a:t>热结代表的是铸件该位置的凝固时间长短，越慢凝固的区域在后续形成缩孔的可能性越大。建议持压时间大于</a:t>
+            </a:r>
+            <a:r>
+              <a:rPr lang="en-US" altLang="zh-CN" sz="2400" dirty="0"/>
+              <a:t>5s </a:t>
+            </a:r>
+            <a:r>
+              <a:rPr lang="zh-CN" altLang="en-US" sz="2400" dirty="0"/>
+              <a:t>。</a:t>
             </a:r>
             <a:endParaRPr lang="zh-CN" altLang="en-US" sz="2400" dirty="0"/>
           </a:p>
@@ -4919,14 +4963,14 @@
       </p:sp>
       <p:sp>
         <p:nvSpPr>
-          <p:cNvPr id="7" name="文本框 6"/>
+          <p:cNvPr id="2" name="文本框 1"/>
           <p:cNvSpPr txBox="1"/>
           <p:nvPr/>
         </p:nvSpPr>
         <p:spPr>
           <a:xfrm>
             <a:off x="665826" y="1614059"/>
-            <a:ext cx="10955044" cy="2061210"/>
+            <a:ext cx="10955044" cy="2553335"/>
           </a:xfrm>
           <a:prstGeom prst="rect">
             <a:avLst/>
@@ -4950,20 +4994,20 @@
               <a:rPr lang="zh-CN" altLang="en-US" sz="3200" dirty="0">
                 <a:sym typeface="+mn-ea"/>
               </a:rPr>
-              <a:t>、根据仿真结果来看，渣包体积较小，无法充分容纳</a:t>
+              <a:t>、</a:t>
             </a:r>
             <a:r>
               <a:rPr lang="zh-CN" altLang="en-US" sz="3200" dirty="0">
                 <a:sym typeface="+mn-ea"/>
               </a:rPr>
-              <a:t>氧化物。</a:t>
-            </a:r>
-            <a:endParaRPr lang="zh-CN" altLang="en-US" sz="3200" dirty="0">
-              <a:sym typeface="+mn-ea"/>
-            </a:endParaRPr>
-          </a:p>
-          <a:p>
-            <a:pPr algn="just"/>
+              <a:t>大部分卷气能顺着渣包方向被收集，但是</a:t>
+            </a:r>
+            <a:r>
+              <a:rPr lang="zh-CN" altLang="en-US" sz="3200" dirty="0">
+                <a:sym typeface="+mn-ea"/>
+              </a:rPr>
+              <a:t>部分部位存在轻微卷气</a:t>
+            </a:r>
             <a:endParaRPr lang="zh-CN" altLang="en-US" sz="3200" dirty="0">
               <a:sym typeface="+mn-ea"/>
             </a:endParaRPr>
@@ -5004,7 +5048,7 @@
               <a:rPr lang="en-US" altLang="zh-CN" sz="3200" dirty="0">
                 <a:sym typeface="+mn-ea"/>
               </a:rPr>
-              <a:t>0.75cm³</a:t>
+              <a:t>25cm³</a:t>
             </a:r>
             <a:r>
               <a:rPr lang="zh-CN" altLang="en-US" sz="3200" dirty="0">
@@ -5017,6 +5061,30 @@
                 <a:sym typeface="+mn-ea"/>
               </a:rPr>
               <a:t>。</a:t>
+            </a:r>
+            <a:endParaRPr lang="zh-CN" altLang="en-US" sz="3200" dirty="0">
+              <a:sym typeface="+mn-ea"/>
+            </a:endParaRPr>
+          </a:p>
+          <a:p>
+            <a:pPr algn="just"/>
+            <a:r>
+              <a:rPr lang="en-US" altLang="zh-CN" sz="3200" dirty="0">
+                <a:sym typeface="+mn-ea"/>
+              </a:rPr>
+              <a:t>3</a:t>
+            </a:r>
+            <a:r>
+              <a:rPr lang="zh-CN" altLang="en-US" sz="3200" dirty="0">
+                <a:sym typeface="+mn-ea"/>
+              </a:rPr>
+              <a:t>、</a:t>
+            </a:r>
+            <a:r>
+              <a:rPr lang="zh-CN" altLang="en-US" sz="3200" dirty="0">
+                <a:sym typeface="+mn-ea"/>
+              </a:rPr>
+              <a:t>铸件内边缘氧化物含量较高。</a:t>
             </a:r>
             <a:endParaRPr lang="zh-CN" altLang="en-US" sz="3200" dirty="0">
               <a:sym typeface="+mn-ea"/>

--- a/自动化模板.pptx
+++ b/自动化模板.pptx
@@ -29,7 +29,9 @@
     <p:sldId id="302" r:id="rId24"/>
     <p:sldId id="303" r:id="rId25"/>
     <p:sldId id="304" r:id="rId26"/>
-    <p:sldId id="307" r:id="rId27"/>
+    <p:sldId id="312" r:id="rId27"/>
+    <p:sldId id="313" r:id="rId28"/>
+    <p:sldId id="307" r:id="rId29"/>
   </p:sldIdLst>
   <p:sldSz cx="12192000" cy="6858000"/>
   <p:notesSz cx="6858000" cy="9144000"/>
@@ -4915,6 +4917,203 @@
         <p:cNvGrpSpPr/>
         <p:nvPr/>
       </p:nvGrpSpPr>
+      <p:grpSpPr/>
+      <p:sp>
+        <p:nvSpPr>
+          <p:cNvPr id="3" name="文本框 2"/>
+          <p:cNvSpPr txBox="1"/>
+          <p:nvPr/>
+        </p:nvSpPr>
+        <p:spPr>
+          <a:xfrm>
+            <a:off x="-87" y="56"/>
+            <a:ext cx="4064000" cy="460375"/>
+          </a:xfrm>
+          <a:prstGeom prst="rect">
+            <a:avLst/>
+          </a:prstGeom>
+          <a:noFill/>
+        </p:spPr>
+        <p:txBody>
+          <a:bodyPr wrap="square" rtlCol="0">
+            <a:spAutoFit/>
+          </a:bodyPr>
+          <a:lstStyle/>
+          <a:p>
+            <a:r>
+              <a:rPr lang="zh-CN" altLang="en-US" sz="2400" b="1" dirty="0"/>
+              <a:t>气压</a:t>
+            </a:r>
+            <a:endParaRPr lang="zh-CN" altLang="en-US" sz="2400" b="1" dirty="0"/>
+          </a:p>
+        </p:txBody>
+      </p:sp>
+      <p:sp>
+        <p:nvSpPr>
+          <p:cNvPr id="2" name="VID_qiya"/>
+          <p:cNvSpPr/>
+          <p:nvPr/>
+        </p:nvSpPr>
+        <p:spPr>
+          <a:xfrm>
+            <a:off x="-635" y="389890"/>
+            <a:ext cx="12193270" cy="5634990"/>
+          </a:xfrm>
+          <a:prstGeom prst="rect">
+            <a:avLst/>
+          </a:prstGeom>
+          <a:solidFill>
+            <a:schemeClr val="bg2"/>
+          </a:solidFill>
+        </p:spPr>
+        <p:style>
+          <a:lnRef idx="2">
+            <a:schemeClr val="accent1">
+              <a:lumMod val="75000"/>
+            </a:schemeClr>
+          </a:lnRef>
+          <a:fillRef idx="1">
+            <a:schemeClr val="accent1"/>
+          </a:fillRef>
+          <a:effectRef idx="0">
+            <a:srgbClr val="FFFFFF"/>
+          </a:effectRef>
+          <a:fontRef idx="minor">
+            <a:schemeClr val="lt1"/>
+          </a:fontRef>
+        </p:style>
+        <p:txBody>
+          <a:bodyPr rtlCol="0" anchor="ctr"/>
+          <a:p>
+            <a:pPr algn="ctr"/>
+            <a:endParaRPr lang="zh-CN" altLang="en-US"/>
+          </a:p>
+        </p:txBody>
+      </p:sp>
+    </p:spTree>
+  </p:cSld>
+  <p:clrMapOvr>
+    <a:masterClrMapping/>
+  </p:clrMapOvr>
+  <p:timing>
+    <p:tnLst>
+      <p:par>
+        <p:cTn id="1" dur="indefinite" restart="never" nodeType="tmRoot"/>
+      </p:par>
+    </p:tnLst>
+  </p:timing>
+</p:sld>
+</file>
+
+<file path=ppt/slides/slide26.xml><?xml version="1.0" encoding="utf-8"?>
+<p:sld xmlns:a="http://schemas.openxmlformats.org/drawingml/2006/main" xmlns:r="http://schemas.openxmlformats.org/officeDocument/2006/relationships" xmlns:p="http://schemas.openxmlformats.org/presentationml/2006/main">
+  <p:cSld>
+    <p:spTree>
+      <p:nvGrpSpPr>
+        <p:cNvPr id="1" name=""/>
+        <p:cNvGrpSpPr/>
+        <p:nvPr/>
+      </p:nvGrpSpPr>
+      <p:grpSpPr/>
+      <p:sp>
+        <p:nvSpPr>
+          <p:cNvPr id="5" name="文本框 4"/>
+          <p:cNvSpPr txBox="1"/>
+          <p:nvPr/>
+        </p:nvSpPr>
+        <p:spPr>
+          <a:xfrm>
+            <a:off x="200025" y="5934075"/>
+            <a:ext cx="11389360" cy="829945"/>
+          </a:xfrm>
+          <a:prstGeom prst="rect">
+            <a:avLst/>
+          </a:prstGeom>
+          <a:noFill/>
+        </p:spPr>
+        <p:txBody>
+          <a:bodyPr wrap="square" rtlCol="0">
+            <a:spAutoFit/>
+          </a:bodyPr>
+          <a:lstStyle/>
+          <a:p>
+            <a:r>
+              <a:rPr lang="zh-CN" altLang="en-US" sz="2400">
+                <a:sym typeface="+mn-ea"/>
+              </a:rPr>
+              <a:t>气压越大，出现气孔等概率越高，如上图箭头所示部位气压比较大，出现气孔的风险高，建议局部调整渣包，或者加镶件、镶针、顶针等辅助排气</a:t>
+            </a:r>
+            <a:r>
+              <a:rPr lang="zh-CN" altLang="en-US" sz="2400" dirty="0"/>
+              <a:t>。</a:t>
+            </a:r>
+            <a:endParaRPr lang="zh-CN" altLang="en-US" sz="2400" dirty="0"/>
+          </a:p>
+        </p:txBody>
+      </p:sp>
+      <p:sp>
+        <p:nvSpPr>
+          <p:cNvPr id="2" name="IMG_qiya"/>
+          <p:cNvSpPr/>
+          <p:nvPr/>
+        </p:nvSpPr>
+        <p:spPr>
+          <a:xfrm>
+            <a:off x="0" y="635"/>
+            <a:ext cx="12192000" cy="5848350"/>
+          </a:xfrm>
+          <a:prstGeom prst="rect">
+            <a:avLst/>
+          </a:prstGeom>
+          <a:solidFill>
+            <a:schemeClr val="bg2"/>
+          </a:solidFill>
+        </p:spPr>
+        <p:style>
+          <a:lnRef idx="2">
+            <a:schemeClr val="accent1">
+              <a:lumMod val="75000"/>
+            </a:schemeClr>
+          </a:lnRef>
+          <a:fillRef idx="1">
+            <a:schemeClr val="accent1"/>
+          </a:fillRef>
+          <a:effectRef idx="0">
+            <a:srgbClr val="FFFFFF"/>
+          </a:effectRef>
+          <a:fontRef idx="minor">
+            <a:schemeClr val="lt1"/>
+          </a:fontRef>
+        </p:style>
+        <p:txBody>
+          <a:bodyPr rtlCol="0" anchor="ctr"/>
+          <a:p>
+            <a:pPr algn="ctr"/>
+            <a:r>
+              <a:rPr lang="en-US" altLang="zh-CN"/>
+              <a:t>yttyyy</a:t>
+            </a:r>
+            <a:endParaRPr lang="en-US" altLang="zh-CN"/>
+          </a:p>
+        </p:txBody>
+      </p:sp>
+    </p:spTree>
+  </p:cSld>
+  <p:clrMapOvr>
+    <a:masterClrMapping/>
+  </p:clrMapOvr>
+</p:sld>
+</file>
+
+<file path=ppt/slides/slide27.xml><?xml version="1.0" encoding="utf-8"?>
+<p:sld xmlns:a="http://schemas.openxmlformats.org/drawingml/2006/main" xmlns:r="http://schemas.openxmlformats.org/officeDocument/2006/relationships" xmlns:p="http://schemas.openxmlformats.org/presentationml/2006/main">
+  <p:cSld>
+    <p:spTree>
+      <p:nvGrpSpPr>
+        <p:cNvPr id="1" name=""/>
+        <p:cNvGrpSpPr/>
+        <p:nvPr/>
+      </p:nvGrpSpPr>
       <p:grpSpPr>
         <a:xfrm>
           <a:off x="0" y="0"/>
